--- a/yunqi-2026-agenda-201/docs/洞察一页-05-敏捷基础设施助力具身智能（智元）.pptx
+++ b/yunqi-2026-agenda-201/docs/洞察一页-05-敏捷基础设施助力具身智能（智元）.pptx
@@ -3141,7 +3141,7 @@
         <p:spPr>
           <a:xfrm>
             <a:off x="0" y="0"/>
-            <a:ext cx="12191695" cy="1051560"/>
+            <a:ext cx="12191695" cy="1097280"/>
           </a:xfrm>
           <a:prstGeom prst="rect">
             <a:avLst/>
@@ -3183,8 +3183,8 @@
         </p:nvSpPr>
         <p:spPr>
           <a:xfrm>
-            <a:off x="365760" y="146304"/>
-            <a:ext cx="11430000" cy="274320"/>
+            <a:off x="320040" y="91440"/>
+            <a:ext cx="11521440" cy="237744"/>
           </a:xfrm>
           <a:prstGeom prst="rect">
             <a:avLst/>
@@ -3199,7 +3199,7 @@
           <a:p>
             <a:pPr algn="l"/>
             <a:r>
-              <a:rPr sz="1300" b="0">
+              <a:rPr sz="1200" b="0">
                 <a:solidFill>
                   <a:srgbClr val="6B6B6B"/>
                 </a:solidFill>
@@ -3219,8 +3219,8 @@
         </p:nvSpPr>
         <p:spPr>
           <a:xfrm>
-            <a:off x="365760" y="420624"/>
-            <a:ext cx="11430000" cy="502920"/>
+            <a:off x="320040" y="347472"/>
+            <a:ext cx="11521440" cy="658368"/>
           </a:xfrm>
           <a:prstGeom prst="rect">
             <a:avLst/>
@@ -3235,14 +3235,14 @@
           <a:p>
             <a:pPr algn="l"/>
             <a:r>
-              <a:rPr sz="2000" b="1">
+              <a:rPr sz="1600" b="1">
                 <a:solidFill>
                   <a:srgbClr val="1A1A1A"/>
                 </a:solidFill>
                 <a:latin typeface="Microsoft YaHei"/>
                 <a:ea typeface="Microsoft YaHei"/>
               </a:rPr>
-              <a:t>洞察：具身智能 Infra = 异构智算（含仿真卡）+ ACK 统一混部 + 托管 Argo/Ray…</a:t>
+              <a:t>洞察：具身智能 Infra = 异构智算（含仿真卡）+ ACK 统一混部 + 托管 Argo/Ray 数据引擎 + 边缘回传，HCS 应按此整包对标而非零散卖 GPU。</a:t>
             </a:r>
           </a:p>
         </p:txBody>
@@ -3255,8 +3255,8 @@
         </p:nvSpPr>
         <p:spPr>
           <a:xfrm>
-            <a:off x="320040" y="1207008"/>
-            <a:ext cx="11521440" cy="502920"/>
+            <a:off x="274320" y="1207008"/>
+            <a:ext cx="11612880" cy="749808"/>
           </a:xfrm>
           <a:prstGeom prst="rect">
             <a:avLst/>
@@ -3300,8 +3300,8 @@
         </p:nvSpPr>
         <p:spPr>
           <a:xfrm>
-            <a:off x="457200" y="1298448"/>
-            <a:ext cx="11247120" cy="365760"/>
+            <a:off x="411480" y="1261872"/>
+            <a:ext cx="11338560" cy="640080"/>
           </a:xfrm>
           <a:prstGeom prst="rect">
             <a:avLst/>
@@ -3316,14 +3316,14 @@
           <a:p>
             <a:pPr algn="l"/>
             <a:r>
-              <a:rPr sz="1300" b="1">
+              <a:rPr sz="1200" b="1">
                 <a:solidFill>
                   <a:srgbClr val="1A1A1A"/>
                 </a:solidFill>
                 <a:latin typeface="Microsoft YaHei"/>
                 <a:ea typeface="Microsoft YaHei"/>
               </a:rPr>
-              <a:t>一句话判断：本场展示阿里云具身智能基础设施与智元/觅蜂业务的结合：HPDA Robotics 一体化覆盖采集-管理-标注-训练-仿真-推理，ACK Pro 统一纳管 ECS/灵骏/ACS 与 Ray/Argo/DataJuicer…</a:t>
+              <a:t>一句话判断：本场展示阿里云具身智能基础设施与智元/觅蜂业务的结合：HPDA Robotics 一体化覆盖采集-管理-标注-训练-仿真-推理，ACK Pro 统一纳管 ECS/灵骏/ACS 与 Ray/Argo/DataJuicer；硬件侧推出面向推理仿真的 L20N（Blackwell）GPU。</a:t>
             </a:r>
           </a:p>
         </p:txBody>
@@ -3336,8 +3336,8 @@
         </p:nvSpPr>
         <p:spPr>
           <a:xfrm>
-            <a:off x="320040" y="1874519"/>
-            <a:ext cx="3703320" cy="2606040"/>
+            <a:off x="274320" y="2084831"/>
+            <a:ext cx="3749039" cy="2267712"/>
           </a:xfrm>
           <a:prstGeom prst="rect">
             <a:avLst/>
@@ -3381,8 +3381,8 @@
         </p:nvSpPr>
         <p:spPr>
           <a:xfrm>
-            <a:off x="457200" y="2011679"/>
-            <a:ext cx="3429000" cy="320040"/>
+            <a:off x="402336" y="2176271"/>
+            <a:ext cx="3493007" cy="292608"/>
           </a:xfrm>
           <a:prstGeom prst="rect">
             <a:avLst/>
@@ -3397,7 +3397,7 @@
           <a:p>
             <a:pPr algn="l"/>
             <a:r>
-              <a:rPr sz="1500" b="1">
+              <a:rPr sz="1400" b="1">
                 <a:solidFill>
                   <a:srgbClr val="8B1A2B"/>
                 </a:solidFill>
@@ -3417,8 +3417,8 @@
         </p:nvSpPr>
         <p:spPr>
           <a:xfrm>
-            <a:off x="484632" y="2377439"/>
-            <a:ext cx="3374136" cy="1965960"/>
+            <a:off x="402336" y="2487167"/>
+            <a:ext cx="3493007" cy="1764792"/>
           </a:xfrm>
           <a:prstGeom prst="rect">
             <a:avLst/>
@@ -3433,52 +3433,69 @@
           <a:p>
             <a:pPr algn="l">
               <a:spcAft>
-                <a:spcPts val="400"/>
+                <a:spcPts val="200"/>
               </a:spcAft>
             </a:pPr>
             <a:r>
-              <a:rPr sz="1200" b="1">
+              <a:rPr sz="1100" b="1">
                 <a:solidFill>
                   <a:srgbClr val="1A1A1A"/>
                 </a:solidFill>
                 <a:latin typeface="Microsoft YaHei"/>
                 <a:ea typeface="Microsoft YaHei"/>
               </a:rPr>
-              <a:t>数据层：兼容 HDFS/DB3/lerobot/mcap 等，支持转换/回放/检索…</a:t>
+              <a:t>HCS 具身解决方案应打包「格式兼容数据湖 + 托管工作流 + Ray 算子市场 + 异构 GPU 池」</a:t>
             </a:r>
           </a:p>
           <a:p>
             <a:pPr algn="l">
               <a:spcAft>
-                <a:spcPts val="400"/>
+                <a:spcPts val="200"/>
               </a:spcAft>
             </a:pPr>
             <a:r>
-              <a:rPr sz="1200" b="0">
+              <a:rPr sz="1100" b="0">
                 <a:solidFill>
                   <a:srgbClr val="4A4A4A"/>
                 </a:solidFill>
                 <a:latin typeface="Microsoft YaHei"/>
                 <a:ea typeface="Microsoft YaHei"/>
               </a:rPr>
-              <a:t>• 编排与处理：全托管 Argo Workflows 支撑万级并发 Serverless 编排；Ray + DataJuicer 托管多模…</a:t>
+              <a:t>• 数据层：兼容 HDFS/DB3/lerobot/mcap 等，支持转换/回放/检索/标注/训练</a:t>
             </a:r>
           </a:p>
           <a:p>
             <a:pPr algn="l">
               <a:spcAft>
-                <a:spcPts val="400"/>
+                <a:spcPts val="200"/>
               </a:spcAft>
             </a:pPr>
             <a:r>
-              <a:rPr sz="1200" b="0">
+              <a:rPr sz="1100" b="0">
                 <a:solidFill>
                   <a:srgbClr val="4A4A4A"/>
                 </a:solidFill>
                 <a:latin typeface="Microsoft YaHei"/>
                 <a:ea typeface="Microsoft YaHei"/>
               </a:rPr>
-              <a:t>• 容器与资源：ACK Pro/ACS 异构资源池、百万节点级兼容、每分钟数万 Pod 弹性；算力 ECS/ACS + EGS/灵骏，存储…</a:t>
+              <a:t>• 编排与处理：全托管 Argo Workflows 支撑万级并发 Serverless 编排</a:t>
+            </a:r>
+          </a:p>
+          <a:p>
+            <a:pPr algn="l">
+              <a:spcAft>
+                <a:spcPts val="200"/>
+              </a:spcAft>
+            </a:pPr>
+            <a:r>
+              <a:rPr sz="1100" b="0">
+                <a:solidFill>
+                  <a:srgbClr val="4A4A4A"/>
+                </a:solidFill>
+                <a:latin typeface="Microsoft YaHei"/>
+                <a:ea typeface="Microsoft YaHei"/>
+              </a:rPr>
+              <a:t>• 容器与资源：ACK Pro/ACS 异构资源池、百万节点级兼容、每分钟数万 Pod 弹性</a:t>
             </a:r>
           </a:p>
         </p:txBody>
@@ -3491,8 +3508,8 @@
         </p:nvSpPr>
         <p:spPr>
           <a:xfrm>
-            <a:off x="4224528" y="1874519"/>
-            <a:ext cx="3703320" cy="2606040"/>
+            <a:off x="4187951" y="2084831"/>
+            <a:ext cx="3749039" cy="2267712"/>
           </a:xfrm>
           <a:prstGeom prst="rect">
             <a:avLst/>
@@ -3536,8 +3553,8 @@
         </p:nvSpPr>
         <p:spPr>
           <a:xfrm>
-            <a:off x="4361688" y="2011679"/>
-            <a:ext cx="3429000" cy="320040"/>
+            <a:off x="4315967" y="2176271"/>
+            <a:ext cx="3493007" cy="292608"/>
           </a:xfrm>
           <a:prstGeom prst="rect">
             <a:avLst/>
@@ -3552,14 +3569,14 @@
           <a:p>
             <a:pPr algn="l"/>
             <a:r>
-              <a:rPr sz="1500" b="1">
+              <a:rPr sz="1400" b="1">
                 <a:solidFill>
                   <a:srgbClr val="8B1A2B"/>
                 </a:solidFill>
                 <a:latin typeface="Microsoft YaHei"/>
                 <a:ea typeface="Microsoft YaHei"/>
               </a:rPr>
-              <a:t>02  L20N：面向推理与仿真的 B…</a:t>
+              <a:t>02  L20N</a:t>
             </a:r>
           </a:p>
         </p:txBody>
@@ -3572,8 +3589,8 @@
         </p:nvSpPr>
         <p:spPr>
           <a:xfrm>
-            <a:off x="4389120" y="2377439"/>
-            <a:ext cx="3374136" cy="1965960"/>
+            <a:off x="4315967" y="2487167"/>
+            <a:ext cx="3493007" cy="1764792"/>
           </a:xfrm>
           <a:prstGeom prst="rect">
             <a:avLst/>
@@ -3588,28 +3605,45 @@
           <a:p>
             <a:pPr algn="l">
               <a:spcAft>
-                <a:spcPts val="400"/>
+                <a:spcPts val="200"/>
               </a:spcAft>
             </a:pPr>
             <a:r>
-              <a:rPr sz="1200" b="1">
+              <a:rPr sz="1100" b="1">
                 <a:solidFill>
                   <a:srgbClr val="1A1A1A"/>
                 </a:solidFill>
                 <a:latin typeface="Microsoft YaHei"/>
                 <a:ea typeface="Microsoft YaHei"/>
               </a:rPr>
-              <a:t>L20N（RTX Pro 5000）非切版 Quadro，48G/72G 显存，G…</a:t>
+              <a:t>具身仿真与 VLA 推理对高显存与图形/物理仿真性能敏感，HCS 智算目录需单独规划「仿真推理卡」规格（高 VRAM + 高频 CPU 配比），不能只用训练卡规格覆盖</a:t>
             </a:r>
           </a:p>
           <a:p>
             <a:pPr algn="l">
               <a:spcAft>
-                <a:spcPts val="400"/>
+                <a:spcPts val="200"/>
               </a:spcAft>
             </a:pPr>
             <a:r>
-              <a:rPr sz="1200" b="0">
+              <a:rPr sz="1100" b="0">
+                <a:solidFill>
+                  <a:srgbClr val="4A4A4A"/>
+                </a:solidFill>
+                <a:latin typeface="Microsoft YaHei"/>
+                <a:ea typeface="Microsoft YaHei"/>
+              </a:rPr>
+              <a:t>• L20N（RTX Pro 5000）非切版 Quadro，48G/72G 显存，GDDR7 带宽 1344GB/s，搭配高频 CPU（256 vCPU、全核 4GHz+）</a:t>
+            </a:r>
+          </a:p>
+          <a:p>
+            <a:pPr algn="l">
+              <a:spcAft>
+                <a:spcPts val="200"/>
+              </a:spcAft>
+            </a:pPr>
+            <a:r>
+              <a:rPr sz="1100" b="0">
                 <a:solidFill>
                   <a:srgbClr val="4A4A4A"/>
                 </a:solidFill>
@@ -3622,18 +3656,18 @@
           <a:p>
             <a:pPr algn="l">
               <a:spcAft>
-                <a:spcPts val="400"/>
+                <a:spcPts val="200"/>
               </a:spcAft>
             </a:pPr>
             <a:r>
-              <a:rPr sz="1200" b="0">
+              <a:rPr sz="1100" b="0">
                 <a:solidFill>
                   <a:srgbClr val="4A4A4A"/>
                 </a:solidFill>
                 <a:latin typeface="Microsoft YaHei"/>
                 <a:ea typeface="Microsoft YaHei"/>
               </a:rPr>
-              <a:t>• IsaacSim：物理仿真近 RTX 5090，图像生成快 10%~20%；满仓场景约 261 FPS。GR00T 全身控制：8×L2…</a:t>
+              <a:t>• IsaacSim：物理仿真近 RTX 5090，图像生成快 10%~20%</a:t>
             </a:r>
           </a:p>
         </p:txBody>
@@ -3646,8 +3680,8 @@
         </p:nvSpPr>
         <p:spPr>
           <a:xfrm>
-            <a:off x="8129016" y="1874519"/>
-            <a:ext cx="3703320" cy="2606040"/>
+            <a:off x="8101582" y="2084831"/>
+            <a:ext cx="3749039" cy="2267712"/>
           </a:xfrm>
           <a:prstGeom prst="rect">
             <a:avLst/>
@@ -3691,8 +3725,8 @@
         </p:nvSpPr>
         <p:spPr>
           <a:xfrm>
-            <a:off x="8266176" y="2011679"/>
-            <a:ext cx="3429000" cy="320040"/>
+            <a:off x="8229598" y="2176271"/>
+            <a:ext cx="3493007" cy="292608"/>
           </a:xfrm>
           <a:prstGeom prst="rect">
             <a:avLst/>
@@ -3707,14 +3741,14 @@
           <a:p>
             <a:pPr algn="l"/>
             <a:r>
-              <a:rPr sz="1500" b="1">
+              <a:rPr sz="1400" b="1">
                 <a:solidFill>
                   <a:srgbClr val="8B1A2B"/>
                 </a:solidFill>
                 <a:latin typeface="Microsoft YaHei"/>
                 <a:ea typeface="Microsoft YaHei"/>
               </a:rPr>
-              <a:t>03  ACK Pro：统一创建、运维…</a:t>
+              <a:t>03  统一创建、运维与云边纳管</a:t>
             </a:r>
           </a:p>
         </p:txBody>
@@ -3727,8 +3761,8 @@
         </p:nvSpPr>
         <p:spPr>
           <a:xfrm>
-            <a:off x="8293608" y="2377439"/>
-            <a:ext cx="3374136" cy="1965960"/>
+            <a:off x="8229598" y="2487167"/>
+            <a:ext cx="3493007" cy="1764792"/>
           </a:xfrm>
           <a:prstGeom prst="rect">
             <a:avLst/>
@@ -3743,52 +3777,69 @@
           <a:p>
             <a:pPr algn="l">
               <a:spcAft>
-                <a:spcPts val="400"/>
+                <a:spcPts val="200"/>
               </a:spcAft>
             </a:pPr>
             <a:r>
-              <a:rPr sz="1200" b="1">
+              <a:rPr sz="1100" b="1">
                 <a:solidFill>
                   <a:srgbClr val="1A1A1A"/>
                 </a:solidFill>
                 <a:latin typeface="Microsoft YaHei"/>
                 <a:ea typeface="Microsoft YaHei"/>
               </a:rPr>
-              <a:t>上层：SAPIEN 仿真合成、Argo 数据处理、VLA/World Model …</a:t>
+              <a:t>对标要求 HCS CCE 在同一控制面混部通用算力、智算裸金属与 CCI Serverless</a:t>
             </a:r>
           </a:p>
           <a:p>
             <a:pPr algn="l">
               <a:spcAft>
-                <a:spcPts val="400"/>
+                <a:spcPts val="200"/>
               </a:spcAft>
             </a:pPr>
             <a:r>
-              <a:rPr sz="1200" b="0">
+              <a:rPr sz="1100" b="0">
                 <a:solidFill>
                   <a:srgbClr val="4A4A4A"/>
                 </a:solidFill>
                 <a:latin typeface="Microsoft YaHei"/>
                 <a:ea typeface="Microsoft YaHei"/>
               </a:rPr>
-              <a:t>• ACK 托管 Pro：Batch/队列/拓扑感知/混部调度，资源与任务弹性，可观测自愈，数据访问加速，内置 Spark/Ray Ope…</a:t>
+              <a:t>• 上层：SAPIEN 仿真合成、Argo 数据处理、VLA/World Model 训练、ROS/仿真/OS/开发者工具</a:t>
             </a:r>
           </a:p>
           <a:p>
             <a:pPr algn="l">
               <a:spcAft>
-                <a:spcPts val="400"/>
+                <a:spcPts val="200"/>
               </a:spcAft>
             </a:pPr>
             <a:r>
-              <a:rPr sz="1200" b="0">
+              <a:rPr sz="1100" b="0">
                 <a:solidFill>
                   <a:srgbClr val="4A4A4A"/>
                 </a:solidFill>
                 <a:latin typeface="Microsoft YaHei"/>
                 <a:ea typeface="Microsoft YaHei"/>
               </a:rPr>
-              <a:t>• 资源：ECS 节点池、灵骏高性能 GPU/裸金属、ACS Serverless Pod；存储 EBS/OSS/CPFS。统一创建使用、…</a:t>
+              <a:t>• ACK 托管 Pro：Batch/队列/拓扑感知/混部调度，资源与任务弹性，可观测自愈，数据访问加速，内置 Spark/Ray Operator</a:t>
+            </a:r>
+          </a:p>
+          <a:p>
+            <a:pPr algn="l">
+              <a:spcAft>
+                <a:spcPts val="200"/>
+              </a:spcAft>
+            </a:pPr>
+            <a:r>
+              <a:rPr sz="1100" b="0">
+                <a:solidFill>
+                  <a:srgbClr val="4A4A4A"/>
+                </a:solidFill>
+                <a:latin typeface="Microsoft YaHei"/>
+                <a:ea typeface="Microsoft YaHei"/>
+              </a:rPr>
+              <a:t>• 资源：ECS 节点池、灵骏高性能 GPU/裸金属、ACS Serverless Pod</a:t>
             </a:r>
           </a:p>
         </p:txBody>
@@ -3801,8 +3852,8 @@
         </p:nvSpPr>
         <p:spPr>
           <a:xfrm>
-            <a:off x="320040" y="4617720"/>
-            <a:ext cx="7315200" cy="256032"/>
+            <a:off x="274320" y="4553712"/>
+            <a:ext cx="7315200" cy="237744"/>
           </a:xfrm>
           <a:prstGeom prst="rect">
             <a:avLst/>
@@ -3817,7 +3868,7 @@
           <a:p>
             <a:pPr algn="l"/>
             <a:r>
-              <a:rPr sz="1400" b="1">
+              <a:rPr sz="1300" b="1">
                 <a:solidFill>
                   <a:srgbClr val="1A1A1A"/>
                 </a:solidFill>
@@ -3837,8 +3888,8 @@
         </p:nvSpPr>
         <p:spPr>
           <a:xfrm>
-            <a:off x="320040" y="4910328"/>
-            <a:ext cx="1847088" cy="868680"/>
+            <a:off x="274320" y="4809744"/>
+            <a:ext cx="1874519" cy="960120"/>
           </a:xfrm>
           <a:prstGeom prst="rect">
             <a:avLst/>
@@ -3882,8 +3933,8 @@
         </p:nvSpPr>
         <p:spPr>
           <a:xfrm>
-            <a:off x="429768" y="4965192"/>
-            <a:ext cx="1664208" cy="201168"/>
+            <a:off x="365760" y="4864608"/>
+            <a:ext cx="1709927" cy="201168"/>
           </a:xfrm>
           <a:prstGeom prst="rect">
             <a:avLst/>
@@ -3905,7 +3956,7 @@
                 <a:latin typeface="Microsoft YaHei"/>
                 <a:ea typeface="Microsoft YaHei"/>
               </a:rPr>
-              <a:t>阿里云具身智能一体化平…</a:t>
+              <a:t>弹性</a:t>
             </a:r>
           </a:p>
         </p:txBody>
@@ -3918,8 +3969,8 @@
         </p:nvSpPr>
         <p:spPr>
           <a:xfrm>
-            <a:off x="429768" y="5166360"/>
-            <a:ext cx="1664208" cy="237744"/>
+            <a:off x="365760" y="5065776"/>
+            <a:ext cx="1709927" cy="256032"/>
           </a:xfrm>
           <a:prstGeom prst="rect">
             <a:avLst/>
@@ -3941,7 +3992,7 @@
                 <a:latin typeface="Microsoft YaHei"/>
                 <a:ea typeface="Microsoft YaHei"/>
               </a:rPr>
-              <a:t>开源栈：Argo / Ray …</a:t>
+              <a:t>演讲口径</a:t>
             </a:r>
           </a:p>
         </p:txBody>
@@ -3954,8 +4005,8 @@
         </p:nvSpPr>
         <p:spPr>
           <a:xfrm>
-            <a:off x="429768" y="5413248"/>
-            <a:ext cx="1664208" cy="292608"/>
+            <a:off x="365760" y="5340096"/>
+            <a:ext cx="1709927" cy="365760"/>
           </a:xfrm>
           <a:prstGeom prst="rect">
             <a:avLst/>
@@ -3970,14 +4021,14 @@
           <a:p>
             <a:pPr algn="l"/>
             <a:r>
-              <a:rPr sz="1400" b="1">
+              <a:rPr sz="1200" b="1">
                 <a:solidFill>
                   <a:srgbClr val="8B1A2B"/>
                 </a:solidFill>
                 <a:latin typeface="Microsoft YaHei"/>
                 <a:ea typeface="Microsoft YaHei"/>
               </a:rPr>
-              <a:t>弹性：每分钟数万 Pod 级</a:t>
+              <a:t>每分钟数万 Pod 级</a:t>
             </a:r>
           </a:p>
         </p:txBody>
@@ -3990,8 +4041,8 @@
         </p:nvSpPr>
         <p:spPr>
           <a:xfrm>
-            <a:off x="2276856" y="4910328"/>
-            <a:ext cx="1847088" cy="868680"/>
+            <a:off x="2240279" y="4809744"/>
+            <a:ext cx="1874519" cy="960120"/>
           </a:xfrm>
           <a:prstGeom prst="rect">
             <a:avLst/>
@@ -4035,8 +4086,8 @@
         </p:nvSpPr>
         <p:spPr>
           <a:xfrm>
-            <a:off x="2386584" y="4965192"/>
-            <a:ext cx="1664208" cy="201168"/>
+            <a:off x="2331719" y="4864608"/>
+            <a:ext cx="1709927" cy="201168"/>
           </a:xfrm>
           <a:prstGeom prst="rect">
             <a:avLst/>
@@ -4058,7 +4109,7 @@
                 <a:latin typeface="Microsoft YaHei"/>
                 <a:ea typeface="Microsoft YaHei"/>
               </a:rPr>
-              <a:t>L20N：面向推理与仿…</a:t>
+              <a:t>开源栈</a:t>
             </a:r>
           </a:p>
         </p:txBody>
@@ -4071,8 +4122,8 @@
         </p:nvSpPr>
         <p:spPr>
           <a:xfrm>
-            <a:off x="2386584" y="5166360"/>
-            <a:ext cx="1664208" cy="237744"/>
+            <a:off x="2331719" y="5065776"/>
+            <a:ext cx="1709927" cy="256032"/>
           </a:xfrm>
           <a:prstGeom prst="rect">
             <a:avLst/>
@@ -4094,7 +4145,7 @@
                 <a:latin typeface="Microsoft YaHei"/>
                 <a:ea typeface="Microsoft YaHei"/>
               </a:rPr>
-              <a:t>相对 L20：算力约 2.3×</a:t>
+              <a:t>演讲口径</a:t>
             </a:r>
           </a:p>
         </p:txBody>
@@ -4107,8 +4158,8 @@
         </p:nvSpPr>
         <p:spPr>
           <a:xfrm>
-            <a:off x="2386584" y="5413248"/>
-            <a:ext cx="1664208" cy="292608"/>
+            <a:off x="2331719" y="5340096"/>
+            <a:ext cx="1709927" cy="365760"/>
           </a:xfrm>
           <a:prstGeom prst="rect">
             <a:avLst/>
@@ -4123,14 +4174,14 @@
           <a:p>
             <a:pPr algn="l"/>
             <a:r>
-              <a:rPr sz="1400" b="1">
+              <a:rPr sz="1200" b="1">
                 <a:solidFill>
                   <a:srgbClr val="8B1A2B"/>
                 </a:solidFill>
                 <a:latin typeface="Microsoft YaHei"/>
                 <a:ea typeface="Microsoft YaHei"/>
               </a:rPr>
-              <a:t>相对 L20：算力约 2.3×</a:t>
+              <a:t>Argo / Ray / DataJuicer / Kubernetes</a:t>
             </a:r>
           </a:p>
         </p:txBody>
@@ -4143,8 +4194,8 @@
         </p:nvSpPr>
         <p:spPr>
           <a:xfrm>
-            <a:off x="4233672" y="4910328"/>
-            <a:ext cx="1847088" cy="868680"/>
+            <a:off x="4206238" y="4809744"/>
+            <a:ext cx="1874519" cy="960120"/>
           </a:xfrm>
           <a:prstGeom prst="rect">
             <a:avLst/>
@@ -4188,8 +4239,8 @@
         </p:nvSpPr>
         <p:spPr>
           <a:xfrm>
-            <a:off x="4343400" y="4965192"/>
-            <a:ext cx="1664208" cy="201168"/>
+            <a:off x="4297678" y="4864608"/>
+            <a:ext cx="1709927" cy="201168"/>
           </a:xfrm>
           <a:prstGeom prst="rect">
             <a:avLst/>
@@ -4211,7 +4262,7 @@
                 <a:latin typeface="Microsoft YaHei"/>
                 <a:ea typeface="Microsoft YaHei"/>
               </a:rPr>
-              <a:t>ACK Pro：统一创…</a:t>
+              <a:t>显存</a:t>
             </a:r>
           </a:p>
         </p:txBody>
@@ -4224,8 +4275,8 @@
         </p:nvSpPr>
         <p:spPr>
           <a:xfrm>
-            <a:off x="4343400" y="5166360"/>
-            <a:ext cx="1664208" cy="237744"/>
+            <a:off x="4297678" y="5065776"/>
+            <a:ext cx="1709927" cy="256032"/>
           </a:xfrm>
           <a:prstGeom prst="rect">
             <a:avLst/>
@@ -4247,7 +4298,7 @@
                 <a:latin typeface="Microsoft YaHei"/>
                 <a:ea typeface="Microsoft YaHei"/>
               </a:rPr>
-              <a:t>框架：内置 Spark / R…</a:t>
+              <a:t>演讲口径</a:t>
             </a:r>
           </a:p>
         </p:txBody>
@@ -4260,8 +4311,8 @@
         </p:nvSpPr>
         <p:spPr>
           <a:xfrm>
-            <a:off x="4343400" y="5413248"/>
-            <a:ext cx="1664208" cy="292608"/>
+            <a:off x="4297678" y="5340096"/>
+            <a:ext cx="1709927" cy="365760"/>
           </a:xfrm>
           <a:prstGeom prst="rect">
             <a:avLst/>
@@ -4276,14 +4327,14 @@
           <a:p>
             <a:pPr algn="l"/>
             <a:r>
-              <a:rPr sz="1400" b="1">
+              <a:rPr sz="1200" b="1">
                 <a:solidFill>
                   <a:srgbClr val="8B1A2B"/>
                 </a:solidFill>
                 <a:latin typeface="Microsoft YaHei"/>
                 <a:ea typeface="Microsoft YaHei"/>
               </a:rPr>
-              <a:t>一集群混部：ECS + 灵骏 + …</a:t>
+              <a:t>48G / 72G；带宽：1344GB/s GDDR7</a:t>
             </a:r>
           </a:p>
         </p:txBody>
@@ -4296,8 +4347,8 @@
         </p:nvSpPr>
         <p:spPr>
           <a:xfrm>
-            <a:off x="6190488" y="4910328"/>
-            <a:ext cx="1847088" cy="868680"/>
+            <a:off x="6172197" y="4809744"/>
+            <a:ext cx="1874519" cy="960120"/>
           </a:xfrm>
           <a:prstGeom prst="rect">
             <a:avLst/>
@@ -4341,8 +4392,8 @@
         </p:nvSpPr>
         <p:spPr>
           <a:xfrm>
-            <a:off x="6300216" y="4965192"/>
-            <a:ext cx="1664208" cy="201168"/>
+            <a:off x="6263637" y="4864608"/>
+            <a:ext cx="1709927" cy="201168"/>
           </a:xfrm>
           <a:prstGeom prst="rect">
             <a:avLst/>
@@ -4364,7 +4415,7 @@
                 <a:latin typeface="Microsoft YaHei"/>
                 <a:ea typeface="Microsoft YaHei"/>
               </a:rPr>
-              <a:t>智元/觅蜂：物理 AI…</a:t>
+              <a:t>相对 L20</a:t>
             </a:r>
           </a:p>
         </p:txBody>
@@ -4377,8 +4428,8 @@
         </p:nvSpPr>
         <p:spPr>
           <a:xfrm>
-            <a:off x="6300216" y="5166360"/>
-            <a:ext cx="1664208" cy="237744"/>
+            <a:off x="6263637" y="5065776"/>
+            <a:ext cx="1709927" cy="256032"/>
           </a:xfrm>
           <a:prstGeom prst="rect">
             <a:avLst/>
@@ -4400,7 +4451,7 @@
                 <a:latin typeface="Microsoft YaHei"/>
                 <a:ea typeface="Microsoft YaHei"/>
               </a:rPr>
-              <a:t>标注效率：约 10×；轨迹：毫…</a:t>
+              <a:t>演讲口径</a:t>
             </a:r>
           </a:p>
         </p:txBody>
@@ -4413,8 +4464,8 @@
         </p:nvSpPr>
         <p:spPr>
           <a:xfrm>
-            <a:off x="6300216" y="5413248"/>
-            <a:ext cx="1664208" cy="292608"/>
+            <a:off x="6263637" y="5340096"/>
+            <a:ext cx="1709927" cy="365760"/>
           </a:xfrm>
           <a:prstGeom prst="rect">
             <a:avLst/>
@@ -4429,14 +4480,14 @@
           <a:p>
             <a:pPr algn="l"/>
             <a:r>
-              <a:rPr sz="1400" b="1">
+              <a:rPr sz="1200" b="1">
                 <a:solidFill>
                   <a:srgbClr val="8B1A2B"/>
                 </a:solidFill>
                 <a:latin typeface="Microsoft YaHei"/>
                 <a:ea typeface="Microsoft YaHei"/>
               </a:rPr>
-              <a:t>标注效率：约 10×；轨迹：毫米级…</a:t>
+              <a:t>算力约 2.3×</a:t>
             </a:r>
           </a:p>
         </p:txBody>
@@ -4449,8 +4500,8 @@
         </p:nvSpPr>
         <p:spPr>
           <a:xfrm>
-            <a:off x="8147304" y="4910328"/>
-            <a:ext cx="1847088" cy="868680"/>
+            <a:off x="8138156" y="4809744"/>
+            <a:ext cx="1874519" cy="960120"/>
           </a:xfrm>
           <a:prstGeom prst="rect">
             <a:avLst/>
@@ -4494,8 +4545,8 @@
         </p:nvSpPr>
         <p:spPr>
           <a:xfrm>
-            <a:off x="8257032" y="4965192"/>
-            <a:ext cx="1664208" cy="201168"/>
+            <a:off x="8229596" y="4864608"/>
+            <a:ext cx="1709927" cy="201168"/>
           </a:xfrm>
           <a:prstGeom prst="rect">
             <a:avLst/>
@@ -4517,7 +4568,7 @@
                 <a:latin typeface="Microsoft YaHei"/>
                 <a:ea typeface="Microsoft YaHei"/>
               </a:rPr>
-              <a:t>需求一：敏捷弹性——算…</a:t>
+              <a:t>GR00T 单机 8 卡</a:t>
             </a:r>
           </a:p>
         </p:txBody>
@@ -4530,8 +4581,8 @@
         </p:nvSpPr>
         <p:spPr>
           <a:xfrm>
-            <a:off x="8257032" y="5166360"/>
-            <a:ext cx="1664208" cy="237744"/>
+            <a:off x="8229596" y="5065776"/>
+            <a:ext cx="1709927" cy="256032"/>
           </a:xfrm>
           <a:prstGeom prst="rect">
             <a:avLst/>
@@ -4553,7 +4604,7 @@
                 <a:latin typeface="Microsoft YaHei"/>
                 <a:ea typeface="Microsoft YaHei"/>
               </a:rPr>
-              <a:t>峰值回传：约 30 分钟视频/秒</a:t>
+              <a:t>演讲口径</a:t>
             </a:r>
           </a:p>
         </p:txBody>
@@ -4566,8 +4617,8 @@
         </p:nvSpPr>
         <p:spPr>
           <a:xfrm>
-            <a:off x="8257032" y="5413248"/>
-            <a:ext cx="1664208" cy="292608"/>
+            <a:off x="8229596" y="5340096"/>
+            <a:ext cx="1709927" cy="365760"/>
           </a:xfrm>
           <a:prstGeom prst="rect">
             <a:avLst/>
@@ -4582,14 +4633,14 @@
           <a:p>
             <a:pPr algn="l"/>
             <a:r>
-              <a:rPr sz="1400" b="1">
+              <a:rPr sz="1200" b="1">
                 <a:solidFill>
                   <a:srgbClr val="8B1A2B"/>
                 </a:solidFill>
                 <a:latin typeface="Microsoft YaHei"/>
                 <a:ea typeface="Microsoft YaHei"/>
               </a:rPr>
-              <a:t>峰值回传：约 30 分钟视频/秒</a:t>
+              <a:t>较 5090 约 +32%</a:t>
             </a:r>
           </a:p>
         </p:txBody>
@@ -4602,8 +4653,8 @@
         </p:nvSpPr>
         <p:spPr>
           <a:xfrm>
-            <a:off x="10104120" y="4910328"/>
-            <a:ext cx="1847088" cy="868680"/>
+            <a:off x="10104115" y="4809744"/>
+            <a:ext cx="1874519" cy="960120"/>
           </a:xfrm>
           <a:prstGeom prst="rect">
             <a:avLst/>
@@ -4647,8 +4698,8 @@
         </p:nvSpPr>
         <p:spPr>
           <a:xfrm>
-            <a:off x="10213848" y="4965192"/>
-            <a:ext cx="1664208" cy="201168"/>
+            <a:off x="10195555" y="4864608"/>
+            <a:ext cx="1709927" cy="201168"/>
           </a:xfrm>
           <a:prstGeom prst="rect">
             <a:avLst/>
@@ -4670,7 +4721,7 @@
                 <a:latin typeface="Microsoft YaHei"/>
                 <a:ea typeface="Microsoft YaHei"/>
               </a:rPr>
-              <a:t>需求三：边缘到中心一体…</a:t>
+              <a:t>一集群混部</a:t>
             </a:r>
           </a:p>
         </p:txBody>
@@ -4683,8 +4734,8 @@
         </p:nvSpPr>
         <p:spPr>
           <a:xfrm>
-            <a:off x="10213848" y="5166360"/>
-            <a:ext cx="1664208" cy="237744"/>
+            <a:off x="10195555" y="5065776"/>
+            <a:ext cx="1709927" cy="256032"/>
           </a:xfrm>
           <a:prstGeom prst="rect">
             <a:avLst/>
@@ -4706,7 +4757,7 @@
                 <a:latin typeface="Microsoft YaHei"/>
                 <a:ea typeface="Microsoft YaHei"/>
               </a:rPr>
-              <a:t>管理：海量边缘节点统一纳管</a:t>
+              <a:t>演讲口径</a:t>
             </a:r>
           </a:p>
         </p:txBody>
@@ -4719,8 +4770,8 @@
         </p:nvSpPr>
         <p:spPr>
           <a:xfrm>
-            <a:off x="10213848" y="5413248"/>
-            <a:ext cx="1664208" cy="292608"/>
+            <a:off x="10195555" y="5340096"/>
+            <a:ext cx="1709927" cy="365760"/>
           </a:xfrm>
           <a:prstGeom prst="rect">
             <a:avLst/>
@@ -4735,14 +4786,14 @@
           <a:p>
             <a:pPr algn="l"/>
             <a:r>
-              <a:rPr sz="1400" b="1">
+              <a:rPr sz="1200" b="1">
                 <a:solidFill>
                   <a:srgbClr val="8B1A2B"/>
                 </a:solidFill>
                 <a:latin typeface="Microsoft YaHei"/>
                 <a:ea typeface="Microsoft YaHei"/>
               </a:rPr>
-              <a:t>回传：断点续传 + TLS</a:t>
+              <a:t>ECS + 灵骏 + ACS Serverless</a:t>
             </a:r>
           </a:p>
         </p:txBody>
@@ -4755,8 +4806,8 @@
         </p:nvSpPr>
         <p:spPr>
           <a:xfrm>
-            <a:off x="0" y="5989320"/>
-            <a:ext cx="12191695" cy="868680"/>
+            <a:off x="0" y="5870448"/>
+            <a:ext cx="12191695" cy="987552"/>
           </a:xfrm>
           <a:prstGeom prst="rect">
             <a:avLst/>
@@ -4798,8 +4849,8 @@
         </p:nvSpPr>
         <p:spPr>
           <a:xfrm>
-            <a:off x="365760" y="6080760"/>
-            <a:ext cx="11430000" cy="256032"/>
+            <a:off x="320040" y="5943600"/>
+            <a:ext cx="11521440" cy="502920"/>
           </a:xfrm>
           <a:prstGeom prst="rect">
             <a:avLst/>
@@ -4814,14 +4865,14 @@
           <a:p>
             <a:pPr algn="l"/>
             <a:r>
-              <a:rPr sz="1200" b="1">
+              <a:rPr sz="1100" b="1">
                 <a:solidFill>
                   <a:srgbClr val="1A1A1A"/>
                 </a:solidFill>
                 <a:latin typeface="Microsoft YaHei"/>
                 <a:ea typeface="Microsoft YaHei"/>
               </a:rPr>
-              <a:t>可落地动作：具身智能 Infra = 异构智算（含仿真卡）+ ACK 统一混部 + 托管 Argo/Ray 数据引擎 + 边缘回传，HCS 应按此整包对标而非零散卖 GPU。；智元/觅蜂模式证明采集洪峰与多场景边缘是主负载；弹性节点池、Serverl…</a:t>
+              <a:t>可落地动作：具身智能 Infra = 异构智算（含仿真卡）+ ACK 统一混部 + 托管 Argo/Ray 数据引擎 + 边缘回传，HCS 应按此整包对标而非零散卖 GPU；智元/觅蜂模式证明采集洪峰与多场景边缘是主负载；弹性节点池、Serverless、断点续传与分级授权是专属云必须补齐的能力；开源无绑定的一体化平台（数据格式、DataJuicer 算子、工作流）更利于政企落地；用万级并行 Pod 与 Argo 规模指标建立可验收的竞争对标。</a:t>
             </a:r>
           </a:p>
         </p:txBody>
@@ -4834,8 +4885,8 @@
         </p:nvSpPr>
         <p:spPr>
           <a:xfrm>
-            <a:off x="365760" y="6373368"/>
-            <a:ext cx="11430000" cy="256032"/>
+            <a:off x="320040" y="6437376"/>
+            <a:ext cx="11521440" cy="256032"/>
           </a:xfrm>
           <a:prstGeom prst="rect">
             <a:avLst/>
@@ -4850,7 +4901,7 @@
           <a:p>
             <a:pPr algn="l"/>
             <a:r>
-              <a:rPr sz="1000" b="0">
+              <a:rPr sz="900" b="0">
                 <a:solidFill>
                   <a:srgbClr val="6B6B6B"/>
                 </a:solidFill>
@@ -5092,7 +5143,7 @@
         <p:spPr>
           <a:xfrm>
             <a:off x="429768" y="1143000"/>
-            <a:ext cx="3496970" cy="292608"/>
+            <a:ext cx="3496970" cy="384048"/>
           </a:xfrm>
           <a:prstGeom prst="rect">
             <a:avLst/>
@@ -5114,7 +5165,7 @@
                 <a:latin typeface="Microsoft YaHei"/>
                 <a:ea typeface="Microsoft YaHei"/>
               </a:rPr>
-              <a:t>弹性：每分钟数万 Pod 级</a:t>
+              <a:t>弹性：每分钟数万 Pod 级 · 开源栈：Argo / Ray / DataJuicer / Kubernetes</a:t>
             </a:r>
           </a:p>
         </p:txBody>
@@ -5135,7 +5186,7 @@
         </p:blipFill>
         <p:spPr>
           <a:xfrm>
-            <a:off x="429768" y="1928092"/>
+            <a:off x="429768" y="1946380"/>
             <a:ext cx="3496970" cy="2965239"/>
           </a:xfrm>
           <a:prstGeom prst="rect">
@@ -5233,7 +5284,7 @@
         <p:spPr>
           <a:xfrm>
             <a:off x="4347362" y="1143000"/>
-            <a:ext cx="3496970" cy="292608"/>
+            <a:ext cx="3496970" cy="384048"/>
           </a:xfrm>
           <a:prstGeom prst="rect">
             <a:avLst/>
@@ -5255,7 +5306,7 @@
                 <a:latin typeface="Microsoft YaHei"/>
                 <a:ea typeface="Microsoft YaHei"/>
               </a:rPr>
-              <a:t>相对 L20：算力约 2.3×</a:t>
+              <a:t>显存：48G / 72G；</a:t>
             </a:r>
           </a:p>
         </p:txBody>
@@ -5276,7 +5327,7 @@
         </p:blipFill>
         <p:spPr>
           <a:xfrm>
-            <a:off x="4347362" y="1928092"/>
+            <a:off x="4347362" y="1946380"/>
             <a:ext cx="3496970" cy="2965239"/>
           </a:xfrm>
           <a:prstGeom prst="rect">
@@ -5374,7 +5425,7 @@
         <p:spPr>
           <a:xfrm>
             <a:off x="8264956" y="1143000"/>
-            <a:ext cx="3496970" cy="292608"/>
+            <a:ext cx="3496970" cy="384048"/>
           </a:xfrm>
           <a:prstGeom prst="rect">
             <a:avLst/>
@@ -5396,7 +5447,7 @@
                 <a:latin typeface="Microsoft YaHei"/>
                 <a:ea typeface="Microsoft YaHei"/>
               </a:rPr>
-              <a:t>一集群混部：ECS + 灵骏 + …</a:t>
+              <a:t>一集群混部：ECS + 灵骏 + ACS Serverless · 框架：内置 Spark / Ray Operator</a:t>
             </a:r>
           </a:p>
         </p:txBody>
@@ -5417,7 +5468,7 @@
         </p:blipFill>
         <p:spPr>
           <a:xfrm>
-            <a:off x="8264956" y="1928092"/>
+            <a:off x="8264956" y="1946380"/>
             <a:ext cx="3496970" cy="2965239"/>
           </a:xfrm>
           <a:prstGeom prst="rect">

--- a/yunqi-2026-agenda-201/docs/洞察一页-05-敏捷基础设施助力具身智能（智元）.pptx
+++ b/yunqi-2026-agenda-201/docs/洞察一页-05-敏捷基础设施助力具身智能（智元）.pptx
@@ -3242,7 +3242,7 @@
                 <a:latin typeface="Microsoft YaHei"/>
                 <a:ea typeface="Microsoft YaHei"/>
               </a:rPr>
-              <a:t>洞察：具身智能 Infra = 异构智算（含仿真卡）+ ACK 统一混部 + 托管 Argo/Ray 数据引擎 + 边缘回传，HCS 应按此整包对标而非零散卖 GPU。</a:t>
+              <a:t>洞察：具身智能 Infra = 异构智算（含仿真卡）+ ACK 统一混部 + 托管 Argo/Ray 数据引擎 + 边缘回传， 应按此整包对标而非零散卖 GPU。</a:t>
             </a:r>
           </a:p>
         </p:txBody>
@@ -3323,7 +3323,7 @@
                 <a:latin typeface="Microsoft YaHei"/>
                 <a:ea typeface="Microsoft YaHei"/>
               </a:rPr>
-              <a:t>一句话判断：本场展示阿里云具身智能基础设施与智元/觅蜂业务的结合：HPDA Robotics 一体化覆盖采集-管理-标注-训练-仿真-推理，ACK Pro 统一纳管 ECS/灵骏/ACS 与 Ray/Argo/DataJuicer；硬件侧推出面向推理仿真的 L20N（Blackwell）GPU。</a:t>
+              <a:t>一句话判断：智元 ACK / Argo——HPDA Robotics 一体化覆盖采集-管理-标注-训练-仿真-推理，ACK Pro 统一纳管 ECS/灵骏/ACS 与 Ray/Argo/DataJuicer；硬件侧推出面向推理仿真的 L20N（Blackwell）GPU。</a:t>
             </a:r>
           </a:p>
         </p:txBody>
@@ -3444,7 +3444,7 @@
                 <a:latin typeface="Microsoft YaHei"/>
                 <a:ea typeface="Microsoft YaHei"/>
               </a:rPr>
-              <a:t>HCS 具身解决方案应打包「格式兼容数据湖 + 托管工作流 + Ray 算子市场 + 异构 GPU 池」</a:t>
+              <a:t>具身解决方案应打包「格式兼容数据湖 + 托管工作流 + Ray 算子市场 + 异构 GPU 池」，并强调开源无绑定以降低客户锁定期顾虑</a:t>
             </a:r>
           </a:p>
           <a:p>
@@ -3616,7 +3616,7 @@
                 <a:latin typeface="Microsoft YaHei"/>
                 <a:ea typeface="Microsoft YaHei"/>
               </a:rPr>
-              <a:t>具身仿真与 VLA 推理对高显存与图形/物理仿真性能敏感，HCS 智算目录需单独规划「仿真推理卡」规格（高 VRAM + 高频 CPU 配比），不能只用训练卡规格覆盖</a:t>
+              <a:t>具身仿真与 VLA 推理对高显存与图形/物理仿真性能敏感， 智算目录需单独规划「仿真推理卡」规格（高 VRAM + 高频 CPU 配比）</a:t>
             </a:r>
           </a:p>
           <a:p>
@@ -3788,7 +3788,7 @@
                 <a:latin typeface="Microsoft YaHei"/>
                 <a:ea typeface="Microsoft YaHei"/>
               </a:rPr>
-              <a:t>对标要求 HCS CCE 在同一控制面混部通用算力、智算裸金属与 CCI Serverless</a:t>
+              <a:t>对标要求 CCE 在同一控制面混部通用算力、智算裸金属与 CCI Serverless，并原生提供 Ray/Spark Operator 与拓扑感知调度</a:t>
             </a:r>
           </a:p>
           <a:p>
@@ -3956,7 +3956,7 @@
                 <a:latin typeface="Microsoft YaHei"/>
                 <a:ea typeface="Microsoft YaHei"/>
               </a:rPr>
-              <a:t>弹性</a:t>
+              <a:t>相对 L20</a:t>
             </a:r>
           </a:p>
         </p:txBody>
@@ -3992,7 +3992,7 @@
                 <a:latin typeface="Microsoft YaHei"/>
                 <a:ea typeface="Microsoft YaHei"/>
               </a:rPr>
-              <a:t>演讲口径</a:t>
+              <a:t>L20N</a:t>
             </a:r>
           </a:p>
         </p:txBody>
@@ -4028,7 +4028,7 @@
                 <a:latin typeface="Microsoft YaHei"/>
                 <a:ea typeface="Microsoft YaHei"/>
               </a:rPr>
-              <a:t>每分钟数万 Pod 级</a:t>
+              <a:t>算力约 2.3×</a:t>
             </a:r>
           </a:p>
         </p:txBody>
@@ -4109,7 +4109,7 @@
                 <a:latin typeface="Microsoft YaHei"/>
                 <a:ea typeface="Microsoft YaHei"/>
               </a:rPr>
-              <a:t>开源栈</a:t>
+              <a:t>标注效率</a:t>
             </a:r>
           </a:p>
         </p:txBody>
@@ -4145,7 +4145,7 @@
                 <a:latin typeface="Microsoft YaHei"/>
                 <a:ea typeface="Microsoft YaHei"/>
               </a:rPr>
-              <a:t>演讲口径</a:t>
+              <a:t>智元/觅蜂</a:t>
             </a:r>
           </a:p>
         </p:txBody>
@@ -4181,7 +4181,7 @@
                 <a:latin typeface="Microsoft YaHei"/>
                 <a:ea typeface="Microsoft YaHei"/>
               </a:rPr>
-              <a:t>Argo / Ray / DataJuicer / Kubernetes</a:t>
+              <a:t>约 10×；轨迹：毫米级重建</a:t>
             </a:r>
           </a:p>
         </p:txBody>
@@ -4262,7 +4262,7 @@
                 <a:latin typeface="Microsoft YaHei"/>
                 <a:ea typeface="Microsoft YaHei"/>
               </a:rPr>
-              <a:t>显存</a:t>
+              <a:t>相对开源自建</a:t>
             </a:r>
           </a:p>
         </p:txBody>
@@ -4298,7 +4298,7 @@
                 <a:latin typeface="Microsoft YaHei"/>
                 <a:ea typeface="Microsoft YaHei"/>
               </a:rPr>
-              <a:t>演讲口径</a:t>
+              <a:t>托管 Argo</a:t>
             </a:r>
           </a:p>
         </p:txBody>
@@ -4334,7 +4334,7 @@
                 <a:latin typeface="Microsoft YaHei"/>
                 <a:ea typeface="Microsoft YaHei"/>
               </a:rPr>
-              <a:t>48G / 72G；带宽：1344GB/s GDDR7</a:t>
+              <a:t>规模约 10×，资源成本约 -30%</a:t>
             </a:r>
           </a:p>
         </p:txBody>
@@ -4415,7 +4415,7 @@
                 <a:latin typeface="Microsoft YaHei"/>
                 <a:ea typeface="Microsoft YaHei"/>
               </a:rPr>
-              <a:t>相对 L20</a:t>
+              <a:t>GR00T 单机 8 卡</a:t>
             </a:r>
           </a:p>
         </p:txBody>
@@ -4451,7 +4451,7 @@
                 <a:latin typeface="Microsoft YaHei"/>
                 <a:ea typeface="Microsoft YaHei"/>
               </a:rPr>
-              <a:t>演讲口径</a:t>
+              <a:t>L20N</a:t>
             </a:r>
           </a:p>
         </p:txBody>
@@ -4487,7 +4487,7 @@
                 <a:latin typeface="Microsoft YaHei"/>
                 <a:ea typeface="Microsoft YaHei"/>
               </a:rPr>
-              <a:t>算力约 2.3×</a:t>
+              <a:t>较 5090 约 +32%</a:t>
             </a:r>
           </a:p>
         </p:txBody>
@@ -4568,7 +4568,7 @@
                 <a:latin typeface="Microsoft YaHei"/>
                 <a:ea typeface="Microsoft YaHei"/>
               </a:rPr>
-              <a:t>GR00T 单机 8 卡</a:t>
+              <a:t>压测</a:t>
             </a:r>
           </a:p>
         </p:txBody>
@@ -4604,7 +4604,7 @@
                 <a:latin typeface="Microsoft YaHei"/>
                 <a:ea typeface="Microsoft YaHei"/>
               </a:rPr>
-              <a:t>演讲口径</a:t>
+              <a:t>需求一</a:t>
             </a:r>
           </a:p>
         </p:txBody>
@@ -4640,7 +4640,7 @@
                 <a:latin typeface="Microsoft YaHei"/>
                 <a:ea typeface="Microsoft YaHei"/>
               </a:rPr>
-              <a:t>较 5090 约 +32%</a:t>
+              <a:t>并行 Pod 16,000；CPU 利用率 100%</a:t>
             </a:r>
           </a:p>
         </p:txBody>
@@ -4721,7 +4721,7 @@
                 <a:latin typeface="Microsoft YaHei"/>
                 <a:ea typeface="Microsoft YaHei"/>
               </a:rPr>
-              <a:t>一集群混部</a:t>
+              <a:t>回传</a:t>
             </a:r>
           </a:p>
         </p:txBody>
@@ -4757,7 +4757,7 @@
                 <a:latin typeface="Microsoft YaHei"/>
                 <a:ea typeface="Microsoft YaHei"/>
               </a:rPr>
-              <a:t>演讲口径</a:t>
+              <a:t>需求三</a:t>
             </a:r>
           </a:p>
         </p:txBody>
@@ -4793,7 +4793,7 @@
                 <a:latin typeface="Microsoft YaHei"/>
                 <a:ea typeface="Microsoft YaHei"/>
               </a:rPr>
-              <a:t>ECS + 灵骏 + ACS Serverless</a:t>
+              <a:t>断点续传 + TLS</a:t>
             </a:r>
           </a:p>
         </p:txBody>
@@ -4872,7 +4872,7 @@
                 <a:latin typeface="Microsoft YaHei"/>
                 <a:ea typeface="Microsoft YaHei"/>
               </a:rPr>
-              <a:t>可落地动作：具身智能 Infra = 异构智算（含仿真卡）+ ACK 统一混部 + 托管 Argo/Ray 数据引擎 + 边缘回传，HCS 应按此整包对标而非零散卖 GPU；智元/觅蜂模式证明采集洪峰与多场景边缘是主负载；弹性节点池、Serverless、断点续传与分级授权是专属云必须补齐的能力；开源无绑定的一体化平台（数据格式、DataJuicer 算子、工作流）更利于政企落地；用万级并行 Pod 与 Argo 规模指标建立可验收的竞争对标。</a:t>
+              <a:t>启示要点：具身智能 Infra = 异构智算（含仿真卡）+ ACK 统一混部 + 托管 Argo/Ray 数据引擎 + 边缘回传， 应按此整包对标而非零散卖 GPU；智元/觅蜂模式证明采集洪峰与多场景边缘是主负载；弹性节点池、Serverless、断点续传与分级授权是专属云必须补齐的能力；开源无绑定的一体化平台（数据格式、DataJuicer 算子、工作流）更利于政企落地；用万级并行 Pod 与 Argo 规模指标建立可验收的竞争对标。</a:t>
             </a:r>
           </a:p>
         </p:txBody>
@@ -4908,7 +4908,7 @@
                 <a:latin typeface="Microsoft YaHei"/>
                 <a:ea typeface="Microsoft YaHei"/>
               </a:rPr>
-              <a:t>来源：https://yunqi.aliyun.com/2026/session?agendaId=201 · Talk 05 赵堃 / 尹欣  ·  视角：HCS 技术规划</a:t>
+              <a:t>来源：https://yunqi.aliyun.com/2026/session?agendaId=201 · Talk 05 赵堃 / 尹欣</a:t>
             </a:r>
           </a:p>
         </p:txBody>
